--- a/Schools_ML_Track/camp_2026/slides/ML/F02.pptx
+++ b/Schools_ML_Track/camp_2026/slides/ML/F02.pptx
@@ -119,7 +119,7 @@
   <p:extLst>
     <p:ext uri="{521415D9-36F7-43E2-AB2F-B90AF26B5E84}">
       <p14:sectionLst xmlns:p14="http://schemas.microsoft.com/office/powerpoint/2010/main">
-        <p14:section name="Opening" id="{6edc5491-3dcf-b012-ccbe-3fbd3d32223b}">
+        <p14:section name="Opening" id="{49f9665f-6b06-0ee9-07af-98a4c94e0bfe}">
           <p14:sldIdLst>
             <p14:sldId id="256"/>
             <p14:sldId id="257"/>
@@ -129,7 +129,7 @@
             <p14:sldId id="261"/>
           </p14:sldIdLst>
         </p14:section>
-        <p14:section name="Block A" id="{8ce65c59-ef0e-9087-66b6-4691be7a3002}">
+        <p14:section name="Block A" id="{91f96548-a0b9-0545-dad2-3fcf810012f7}">
           <p14:sldIdLst>
             <p14:sldId id="262"/>
             <p14:sldId id="263"/>
@@ -137,7 +137,7 @@
             <p14:sldId id="265"/>
           </p14:sldIdLst>
         </p14:section>
-        <p14:section name="Make and close" id="{e2775b16-8b33-a6a4-4b54-83aa50fe8778}">
+        <p14:section name="Make and close" id="{f052a033-a797-f93d-d81b-1295095ace2e}">
           <p14:sldIdLst>
             <p14:sldId id="266"/>
             <p14:sldId id="267"/>

--- a/Schools_ML_Track/camp_2026/slides/ML/F02.pptx
+++ b/Schools_ML_Track/camp_2026/slides/ML/F02.pptx
@@ -119,7 +119,7 @@
   <p:extLst>
     <p:ext uri="{521415D9-36F7-43E2-AB2F-B90AF26B5E84}">
       <p14:sectionLst xmlns:p14="http://schemas.microsoft.com/office/powerpoint/2010/main">
-        <p14:section name="Opening" id="{49f9665f-6b06-0ee9-07af-98a4c94e0bfe}">
+        <p14:section name="Opening" id="{7574d6fb-908d-3272-49b1-5b1245dcf674}">
           <p14:sldIdLst>
             <p14:sldId id="256"/>
             <p14:sldId id="257"/>
@@ -129,7 +129,7 @@
             <p14:sldId id="261"/>
           </p14:sldIdLst>
         </p14:section>
-        <p14:section name="Block A" id="{91f96548-a0b9-0545-dad2-3fcf810012f7}">
+        <p14:section name="Block A" id="{71b623d9-6ad7-b7b5-0472-236e6404fa68}">
           <p14:sldIdLst>
             <p14:sldId id="262"/>
             <p14:sldId id="263"/>
@@ -137,7 +137,7 @@
             <p14:sldId id="265"/>
           </p14:sldIdLst>
         </p14:section>
-        <p14:section name="Make and close" id="{f052a033-a797-f93d-d81b-1295095ace2e}">
+        <p14:section name="Make and close" id="{008de5cf-654e-bad2-9ce4-350597a6c587}">
           <p14:sldIdLst>
             <p14:sldId id="266"/>
             <p14:sldId id="267"/>
@@ -2362,7 +2362,24 @@
                 <a:ea typeface="Lato" pitchFamily="34" charset="-122"/>
                 <a:cs typeface="Lato" pitchFamily="34" charset="-120"/>
               </a:rPr>
-              <a:t>Lists, vectors and NumPy arrays</a:t>
+              <a:t>Lists, vectors and</a:t>
+            </a:r>
+            <a:endParaRPr lang="en-US" sz="5600" dirty="0"/>
+          </a:p>
+          <a:p>
+            <a:pPr algn="l" indent="0" marL="0">
+              <a:buNone/>
+            </a:pPr>
+            <a:r>
+              <a:rPr lang="en-US" sz="5600" b="1" dirty="0">
+                <a:solidFill>
+                  <a:srgbClr val="FFFFFF"/>
+                </a:solidFill>
+                <a:latin typeface="Lato" pitchFamily="34" charset="0"/>
+                <a:ea typeface="Lato" pitchFamily="34" charset="-122"/>
+                <a:cs typeface="Lato" pitchFamily="34" charset="-120"/>
+              </a:rPr>
+              <a:t>NumPy arrays</a:t>
             </a:r>
             <a:endParaRPr lang="en-US" sz="5600" dirty="0"/>
           </a:p>
@@ -2767,15 +2784,15 @@
           <a:p>
             <a:pPr algn="l" indent="0" marL="0">
               <a:lnSpc>
-                <a:spcPts val="3480"/>
+                <a:spcPts val="2640"/>
               </a:lnSpc>
               <a:spcAft>
-                <a:spcPts val="2520"/>
+                <a:spcPts val="2020"/>
               </a:spcAft>
               <a:buNone/>
             </a:pPr>
             <a:r>
-              <a:rPr lang="en-US" sz="2900" dirty="0">
+              <a:rPr lang="en-US" sz="2200" dirty="0">
                 <a:solidFill>
                   <a:srgbClr val="111111"/>
                 </a:solidFill>
@@ -2783,22 +2800,22 @@
                 <a:ea typeface="Lato" pitchFamily="34" charset="-122"/>
                 <a:cs typeface="Lato" pitchFamily="34" charset="-120"/>
               </a:rPr>
-              <a:t>Make a NumPy array for a home of 65 square metres and 3 rooms. Print its shape. Add a text cell that labels the units of each position. Add the item counts [1, 4, 2] with a loop and then with .sum(). Save F02.ipynb.</a:t>
-            </a:r>
-            <a:endParaRPr lang="en-US" sz="2900" dirty="0"/>
+              <a:t>Make a NumPy array for a home of 65 square metres and 3 rooms.</a:t>
+            </a:r>
+            <a:endParaRPr lang="en-US" sz="2200" dirty="0"/>
           </a:p>
           <a:p>
             <a:pPr algn="l" indent="0" marL="0">
               <a:lnSpc>
-                <a:spcPts val="3480"/>
+                <a:spcPts val="2640"/>
               </a:lnSpc>
               <a:spcAft>
-                <a:spcPts val="2520"/>
+                <a:spcPts val="2020"/>
               </a:spcAft>
               <a:buNone/>
             </a:pPr>
             <a:r>
-              <a:rPr lang="en-US" sz="2900" dirty="0">
+              <a:rPr lang="en-US" sz="2200" dirty="0">
                 <a:solidFill>
                   <a:srgbClr val="111111"/>
                 </a:solidFill>
@@ -2806,9 +2823,101 @@
                 <a:ea typeface="Lato" pitchFamily="34" charset="-122"/>
                 <a:cs typeface="Lato" pitchFamily="34" charset="-120"/>
               </a:rPr>
-              <a:t>Save it as F02. Write two sentences: what you changed and how you checked it.</a:t>
-            </a:r>
-            <a:endParaRPr lang="en-US" sz="2900" dirty="0"/>
+              <a:t>Print its shape.</a:t>
+            </a:r>
+            <a:endParaRPr lang="en-US" sz="2200" dirty="0"/>
+          </a:p>
+          <a:p>
+            <a:pPr algn="l" indent="0" marL="0">
+              <a:lnSpc>
+                <a:spcPts val="2640"/>
+              </a:lnSpc>
+              <a:spcAft>
+                <a:spcPts val="2020"/>
+              </a:spcAft>
+              <a:buNone/>
+            </a:pPr>
+            <a:r>
+              <a:rPr lang="en-US" sz="2200" dirty="0">
+                <a:solidFill>
+                  <a:srgbClr val="111111"/>
+                </a:solidFill>
+                <a:latin typeface="Lato" pitchFamily="34" charset="0"/>
+                <a:ea typeface="Lato" pitchFamily="34" charset="-122"/>
+                <a:cs typeface="Lato" pitchFamily="34" charset="-120"/>
+              </a:rPr>
+              <a:t>Add a text cell that labels the units of each position.</a:t>
+            </a:r>
+            <a:endParaRPr lang="en-US" sz="2200" dirty="0"/>
+          </a:p>
+          <a:p>
+            <a:pPr algn="l" indent="0" marL="0">
+              <a:lnSpc>
+                <a:spcPts val="2640"/>
+              </a:lnSpc>
+              <a:spcAft>
+                <a:spcPts val="2020"/>
+              </a:spcAft>
+              <a:buNone/>
+            </a:pPr>
+            <a:r>
+              <a:rPr lang="en-US" sz="2200" dirty="0">
+                <a:solidFill>
+                  <a:srgbClr val="111111"/>
+                </a:solidFill>
+                <a:latin typeface="Lato" pitchFamily="34" charset="0"/>
+                <a:ea typeface="Lato" pitchFamily="34" charset="-122"/>
+                <a:cs typeface="Lato" pitchFamily="34" charset="-120"/>
+              </a:rPr>
+              <a:t>Add the item counts [1, 4, 2] with a loop and then with .sum().</a:t>
+            </a:r>
+            <a:endParaRPr lang="en-US" sz="2200" dirty="0"/>
+          </a:p>
+          <a:p>
+            <a:pPr algn="l" indent="0" marL="0">
+              <a:lnSpc>
+                <a:spcPts val="2640"/>
+              </a:lnSpc>
+              <a:spcAft>
+                <a:spcPts val="2020"/>
+              </a:spcAft>
+              <a:buNone/>
+            </a:pPr>
+            <a:r>
+              <a:rPr lang="en-US" sz="2200" dirty="0">
+                <a:solidFill>
+                  <a:srgbClr val="111111"/>
+                </a:solidFill>
+                <a:latin typeface="Lato" pitchFamily="34" charset="0"/>
+                <a:ea typeface="Lato" pitchFamily="34" charset="-122"/>
+                <a:cs typeface="Lato" pitchFamily="34" charset="-120"/>
+              </a:rPr>
+              <a:t>Save F02.ipynb.</a:t>
+            </a:r>
+            <a:endParaRPr lang="en-US" sz="2200" dirty="0"/>
+          </a:p>
+          <a:p>
+            <a:pPr algn="l" indent="0" marL="0">
+              <a:lnSpc>
+                <a:spcPts val="2640"/>
+              </a:lnSpc>
+              <a:spcAft>
+                <a:spcPts val="2020"/>
+              </a:spcAft>
+              <a:buNone/>
+            </a:pPr>
+            <a:r>
+              <a:rPr lang="en-US" sz="2200" dirty="0">
+                <a:solidFill>
+                  <a:srgbClr val="111111"/>
+                </a:solidFill>
+                <a:latin typeface="Lato" pitchFamily="34" charset="0"/>
+                <a:ea typeface="Lato" pitchFamily="34" charset="-122"/>
+                <a:cs typeface="Lato" pitchFamily="34" charset="-120"/>
+              </a:rPr>
+              <a:t>Write two sentences: what you changed and how you checked it.</a:t>
+            </a:r>
+            <a:endParaRPr lang="en-US" sz="2200" dirty="0"/>
           </a:p>
         </p:txBody>
       </p:sp>
@@ -6296,371 +6405,40 @@
           </a:p>
         </p:txBody>
       </p:sp>
-      <p:sp>
-        <p:nvSpPr>
-          <p:cNvPr id="3" name="Shape 1"/>
-          <p:cNvSpPr/>
+      <p:pic>
+        <p:nvPicPr>
+          <p:cNvPr id="3" name="Image 0" descr="Look closely">    </p:cNvPr>
+          <p:cNvPicPr>
+            <a:picLocks noChangeAspect="1"/>
+          </p:cNvPicPr>
           <p:nvPr/>
-        </p:nvSpPr>
-        <p:spPr>
-          <a:xfrm>
-            <a:off x="7498080" y="1737360"/>
-            <a:ext cx="4023360" cy="3443732"/>
-          </a:xfrm>
-          <a:prstGeom prst="roundRect">
-            <a:avLst>
-              <a:gd name="adj" fmla="val 2124"/>
-            </a:avLst>
-          </a:prstGeom>
-          <a:solidFill>
-            <a:srgbClr val="111111"/>
-          </a:solidFill>
-          <a:ln/>
-        </p:spPr>
-      </p:sp>
-      <p:sp>
-        <p:nvSpPr>
-          <p:cNvPr id="4" name="Text 2"/>
+        </p:nvPicPr>
+        <p:blipFill>
+          <a:blip r:embed="rId1"/>
+          <a:stretch>
+            <a:fillRect/>
+          </a:stretch>
+        </p:blipFill>
+        <p:spPr>
+          <a:xfrm>
+            <a:off x="9875520" y="4480560"/>
+            <a:ext cx="1645920" cy="1645920"/>
+          </a:xfrm>
+          <a:prstGeom prst="rect">
+            <a:avLst/>
+          </a:prstGeom>
+        </p:spPr>
+      </p:pic>
+      <p:sp>
+        <p:nvSpPr>
+          <p:cNvPr id="4" name="Text 1"/>
           <p:cNvSpPr txBox="1"/>
           <p:nvPr/>
         </p:nvSpPr>
         <p:spPr>
           <a:xfrm>
-            <a:off x="7699248" y="1938528"/>
-            <a:ext cx="3621024" cy="3041396"/>
-          </a:xfrm>
-          <a:prstGeom prst="rect">
-            <a:avLst/>
-          </a:prstGeom>
-          <a:noFill/>
-          <a:ln/>
-        </p:spPr>
-        <p:txBody>
-          <a:bodyPr wrap="square" lIns="0" tIns="0" rIns="0" bIns="0" rtlCol="0" anchor="t"/>
-          <a:lstStyle/>
-          <a:p>
-            <a:pPr algn="l" indent="0" marL="0">
-              <a:lnSpc>
-                <a:spcPts val="1820"/>
-              </a:lnSpc>
-              <a:buNone/>
-            </a:pPr>
-            <a:r>
-              <a:rPr lang="en-US" sz="1400" b="1" dirty="0">
-                <a:solidFill>
-                  <a:srgbClr val="FFFFFF"/>
-                </a:solidFill>
-                <a:latin typeface="Courier New" pitchFamily="34" charset="0"/>
-                <a:ea typeface="Courier New" pitchFamily="34" charset="-122"/>
-                <a:cs typeface="Courier New" pitchFamily="34" charset="-120"/>
-              </a:rPr>
-              <a:t>import</a:t>
-            </a:r>
-            <a:pPr algn="l" indent="0" marL="0">
-              <a:lnSpc>
-                <a:spcPts val="1820"/>
-              </a:lnSpc>
-              <a:buNone/>
-            </a:pPr>
-            <a:r>
-              <a:rPr lang="en-US" sz="1400" dirty="0">
-                <a:solidFill>
-                  <a:srgbClr val="FFFFFF"/>
-                </a:solidFill>
-                <a:latin typeface="Courier New" pitchFamily="34" charset="0"/>
-                <a:ea typeface="Courier New" pitchFamily="34" charset="-122"/>
-                <a:cs typeface="Courier New" pitchFamily="34" charset="-120"/>
-              </a:rPr>
-              <a:t> numpy </a:t>
-            </a:r>
-            <a:pPr algn="l" indent="0" marL="0">
-              <a:lnSpc>
-                <a:spcPts val="1820"/>
-              </a:lnSpc>
-              <a:buNone/>
-            </a:pPr>
-            <a:r>
-              <a:rPr lang="en-US" sz="1400" b="1" dirty="0">
-                <a:solidFill>
-                  <a:srgbClr val="FFFFFF"/>
-                </a:solidFill>
-                <a:latin typeface="Courier New" pitchFamily="34" charset="0"/>
-                <a:ea typeface="Courier New" pitchFamily="34" charset="-122"/>
-                <a:cs typeface="Courier New" pitchFamily="34" charset="-120"/>
-              </a:rPr>
-              <a:t>as</a:t>
-            </a:r>
-            <a:pPr algn="l" indent="0" marL="0">
-              <a:lnSpc>
-                <a:spcPts val="1820"/>
-              </a:lnSpc>
-              <a:buNone/>
-            </a:pPr>
-            <a:r>
-              <a:rPr lang="en-US" sz="1400" dirty="0">
-                <a:solidFill>
-                  <a:srgbClr val="FFFFFF"/>
-                </a:solidFill>
-                <a:latin typeface="Courier New" pitchFamily="34" charset="0"/>
-                <a:ea typeface="Courier New" pitchFamily="34" charset="-122"/>
-                <a:cs typeface="Courier New" pitchFamily="34" charset="-120"/>
-              </a:rPr>
-              <a:t> np</a:t>
-            </a:r>
-            <a:endParaRPr lang="en-US" sz="1400" dirty="0"/>
-          </a:p>
-          <a:p>
-            <a:pPr algn="l" indent="0" marL="0">
-              <a:lnSpc>
-                <a:spcPts val="1820"/>
-              </a:lnSpc>
-              <a:buNone/>
-            </a:pPr>
-            <a:r>
-              <a:rPr lang="en-US" sz="1400" dirty="0">
-                <a:solidFill>
-                  <a:srgbClr val="FFFFFF"/>
-                </a:solidFill>
-                <a:latin typeface="Courier New" pitchFamily="34" charset="0"/>
-                <a:ea typeface="Courier New" pitchFamily="34" charset="-122"/>
-                <a:cs typeface="Courier New" pitchFamily="34" charset="-120"/>
-              </a:rPr>
-              <a:t>home = [40, 2]</a:t>
-            </a:r>
-            <a:endParaRPr lang="en-US" sz="1400" dirty="0"/>
-          </a:p>
-          <a:p>
-            <a:pPr algn="l" indent="0" marL="0">
-              <a:lnSpc>
-                <a:spcPts val="1820"/>
-              </a:lnSpc>
-              <a:buNone/>
-            </a:pPr>
-            <a:r>
-              <a:rPr lang="en-US" sz="1400" dirty="0">
-                <a:solidFill>
-                  <a:srgbClr val="FFFFFF"/>
-                </a:solidFill>
-                <a:latin typeface="Courier New" pitchFamily="34" charset="0"/>
-                <a:ea typeface="Courier New" pitchFamily="34" charset="-122"/>
-                <a:cs typeface="Courier New" pitchFamily="34" charset="-120"/>
-              </a:rPr>
-              <a:t>print(len(home))</a:t>
-            </a:r>
-            <a:endParaRPr lang="en-US" sz="1400" dirty="0"/>
-          </a:p>
-          <a:p>
-            <a:pPr algn="l" indent="0" marL="0">
-              <a:lnSpc>
-                <a:spcPts val="1820"/>
-              </a:lnSpc>
-              <a:buNone/>
-            </a:pPr>
-            <a:r>
-              <a:rPr lang="en-US" sz="1400" dirty="0">
-                <a:solidFill>
-                  <a:srgbClr val="FFFFFF"/>
-                </a:solidFill>
-                <a:latin typeface="Courier New" pitchFamily="34" charset="0"/>
-                <a:ea typeface="Courier New" pitchFamily="34" charset="-122"/>
-                <a:cs typeface="Courier New" pitchFamily="34" charset="-120"/>
-              </a:rPr>
-              <a:t>joined = home + [10, 1]</a:t>
-            </a:r>
-            <a:endParaRPr lang="en-US" sz="1400" dirty="0"/>
-          </a:p>
-          <a:p>
-            <a:pPr algn="l" indent="0" marL="0">
-              <a:lnSpc>
-                <a:spcPts val="1820"/>
-              </a:lnSpc>
-              <a:buNone/>
-            </a:pPr>
-            <a:r>
-              <a:rPr lang="en-US" sz="1400" dirty="0">
-                <a:solidFill>
-                  <a:srgbClr val="FFFFFF"/>
-                </a:solidFill>
-                <a:latin typeface="Courier New" pitchFamily="34" charset="0"/>
-                <a:ea typeface="Courier New" pitchFamily="34" charset="-122"/>
-                <a:cs typeface="Courier New" pitchFamily="34" charset="-120"/>
-              </a:rPr>
-              <a:t>print(joined)</a:t>
-            </a:r>
-            <a:endParaRPr lang="en-US" sz="1400" dirty="0"/>
-          </a:p>
-          <a:p>
-            <a:pPr algn="l" indent="0" marL="0">
-              <a:lnSpc>
-                <a:spcPts val="1820"/>
-              </a:lnSpc>
-              <a:buNone/>
-            </a:pPr>
-            <a:r>
-              <a:rPr lang="en-US" sz="1400" dirty="0">
-                <a:solidFill>
-                  <a:srgbClr val="FFFFFF"/>
-                </a:solidFill>
-                <a:latin typeface="Courier New" pitchFamily="34" charset="0"/>
-                <a:ea typeface="Courier New" pitchFamily="34" charset="-122"/>
-                <a:cs typeface="Courier New" pitchFamily="34" charset="-120"/>
-              </a:rPr>
-              <a:t>home_array = np.array([40, 2])</a:t>
-            </a:r>
-            <a:endParaRPr lang="en-US" sz="1400" dirty="0"/>
-          </a:p>
-          <a:p>
-            <a:pPr algn="l" indent="0" marL="0">
-              <a:lnSpc>
-                <a:spcPts val="1820"/>
-              </a:lnSpc>
-              <a:buNone/>
-            </a:pPr>
-            <a:r>
-              <a:rPr lang="en-US" sz="1400" dirty="0">
-                <a:solidFill>
-                  <a:srgbClr val="FFFFFF"/>
-                </a:solidFill>
-                <a:latin typeface="Courier New" pitchFamily="34" charset="0"/>
-                <a:ea typeface="Courier New" pitchFamily="34" charset="-122"/>
-                <a:cs typeface="Courier New" pitchFamily="34" charset="-120"/>
-              </a:rPr>
-              <a:t>print(home_array.shape)</a:t>
-            </a:r>
-            <a:endParaRPr lang="en-US" sz="1400" dirty="0"/>
-          </a:p>
-          <a:p>
-            <a:pPr algn="l" indent="0" marL="0">
-              <a:lnSpc>
-                <a:spcPts val="1820"/>
-              </a:lnSpc>
-              <a:buNone/>
-            </a:pPr>
-            <a:r>
-              <a:rPr lang="en-US" sz="1400" dirty="0">
-                <a:solidFill>
-                  <a:srgbClr val="FFFFFF"/>
-                </a:solidFill>
-                <a:latin typeface="Courier New" pitchFamily="34" charset="0"/>
-                <a:ea typeface="Courier New" pitchFamily="34" charset="-122"/>
-                <a:cs typeface="Courier New" pitchFamily="34" charset="-120"/>
-              </a:rPr>
-              <a:t>added = home_array + np.array(</a:t>
-            </a:r>
-            <a:endParaRPr lang="en-US" sz="1400" dirty="0"/>
-          </a:p>
-          <a:p>
-            <a:pPr algn="l" indent="0" marL="0">
-              <a:lnSpc>
-                <a:spcPts val="1820"/>
-              </a:lnSpc>
-              <a:buNone/>
-            </a:pPr>
-            <a:r>
-              <a:rPr lang="en-US" sz="1400" dirty="0">
-                <a:solidFill>
-                  <a:srgbClr val="FFFFFF"/>
-                </a:solidFill>
-                <a:latin typeface="Courier New" pitchFamily="34" charset="0"/>
-                <a:ea typeface="Courier New" pitchFamily="34" charset="-122"/>
-                <a:cs typeface="Courier New" pitchFamily="34" charset="-120"/>
-              </a:rPr>
-              <a:t>    [10, 1]</a:t>
-            </a:r>
-            <a:endParaRPr lang="en-US" sz="1400" dirty="0"/>
-          </a:p>
-          <a:p>
-            <a:pPr algn="l" indent="0" marL="0">
-              <a:lnSpc>
-                <a:spcPts val="1820"/>
-              </a:lnSpc>
-              <a:buNone/>
-            </a:pPr>
-            <a:r>
-              <a:rPr lang="en-US" sz="1400" dirty="0">
-                <a:solidFill>
-                  <a:srgbClr val="FFFFFF"/>
-                </a:solidFill>
-                <a:latin typeface="Courier New" pitchFamily="34" charset="0"/>
-                <a:ea typeface="Courier New" pitchFamily="34" charset="-122"/>
-                <a:cs typeface="Courier New" pitchFamily="34" charset="-120"/>
-              </a:rPr>
-              <a:t>)</a:t>
-            </a:r>
-            <a:endParaRPr lang="en-US" sz="1400" dirty="0"/>
-          </a:p>
-          <a:p>
-            <a:pPr algn="l" indent="0" marL="0">
-              <a:lnSpc>
-                <a:spcPts val="1820"/>
-              </a:lnSpc>
-              <a:buNone/>
-            </a:pPr>
-            <a:r>
-              <a:rPr lang="en-US" sz="1400" dirty="0">
-                <a:solidFill>
-                  <a:srgbClr val="FFFFFF"/>
-                </a:solidFill>
-                <a:latin typeface="Courier New" pitchFamily="34" charset="0"/>
-                <a:ea typeface="Courier New" pitchFamily="34" charset="-122"/>
-                <a:cs typeface="Courier New" pitchFamily="34" charset="-120"/>
-              </a:rPr>
-              <a:t>doubled = home_array * 2</a:t>
-            </a:r>
-            <a:endParaRPr lang="en-US" sz="1400" dirty="0"/>
-          </a:p>
-          <a:p>
-            <a:pPr algn="l" indent="0" marL="0">
-              <a:lnSpc>
-                <a:spcPts val="1820"/>
-              </a:lnSpc>
-              <a:buNone/>
-            </a:pPr>
-            <a:r>
-              <a:rPr lang="en-US" sz="1400" dirty="0">
-                <a:solidFill>
-                  <a:srgbClr val="FFFFFF"/>
-                </a:solidFill>
-                <a:latin typeface="Courier New" pitchFamily="34" charset="0"/>
-                <a:ea typeface="Courier New" pitchFamily="34" charset="-122"/>
-                <a:cs typeface="Courier New" pitchFamily="34" charset="-120"/>
-              </a:rPr>
-              <a:t>print(added)</a:t>
-            </a:r>
-            <a:endParaRPr lang="en-US" sz="1400" dirty="0"/>
-          </a:p>
-          <a:p>
-            <a:pPr algn="l" indent="0" marL="0">
-              <a:lnSpc>
-                <a:spcPts val="1820"/>
-              </a:lnSpc>
-              <a:buNone/>
-            </a:pPr>
-            <a:r>
-              <a:rPr lang="en-US" sz="1400" dirty="0">
-                <a:solidFill>
-                  <a:srgbClr val="FFFFFF"/>
-                </a:solidFill>
-                <a:latin typeface="Courier New" pitchFamily="34" charset="0"/>
-                <a:ea typeface="Courier New" pitchFamily="34" charset="-122"/>
-                <a:cs typeface="Courier New" pitchFamily="34" charset="-120"/>
-              </a:rPr>
-              <a:t>print(doubled)</a:t>
-            </a:r>
-            <a:endParaRPr lang="en-US" sz="1400" dirty="0"/>
-          </a:p>
-        </p:txBody>
-      </p:sp>
-      <p:sp>
-        <p:nvSpPr>
-          <p:cNvPr id="5" name="Text 3"/>
-          <p:cNvSpPr txBox="1"/>
-          <p:nvPr/>
-        </p:nvSpPr>
-        <p:spPr>
-          <a:xfrm>
             <a:off x="640080" y="1737360"/>
-            <a:ext cx="6400800" cy="4389120"/>
+            <a:ext cx="8961120" cy="4389120"/>
           </a:xfrm>
           <a:prstGeom prst="rect">
             <a:avLst/>
